--- a/praesentationen/input-05-azure-storage.pptx
+++ b/praesentationen/input-05-azure-storage.pptx
@@ -117,7 +117,7 @@
   <p:extLst>
     <p:ext uri="{521415D9-36F7-43E2-AB2F-B90AF26B5E84}">
       <p14:sectionLst xmlns:p14="http://schemas.microsoft.com/office/powerpoint/2010/main">
-        <p14:section name="Storage" id="{d4a64217-934f-e141-f9cb-bc608d8f15c5}">
+        <p14:section name="Storage" id="{17f79585-a30e-4898-c58f-cd38b0831c19}">
           <p14:sldIdLst>
             <p14:sldId id="256"/>
             <p14:sldId id="257"/>

--- a/praesentationen/input-05-azure-storage.pptx
+++ b/praesentationen/input-05-azure-storage.pptx
@@ -117,7 +117,7 @@
   <p:extLst>
     <p:ext uri="{521415D9-36F7-43E2-AB2F-B90AF26B5E84}">
       <p14:sectionLst xmlns:p14="http://schemas.microsoft.com/office/powerpoint/2010/main">
-        <p14:section name="Storage" id="{17f79585-a30e-4898-c58f-cd38b0831c19}">
+        <p14:section name="Storage" id="{6637bbb7-0eb5-6d09-03ff-d3d9a24f8557}">
           <p14:sldIdLst>
             <p14:sldId id="256"/>
             <p14:sldId id="257"/>
@@ -976,7 +976,7 @@
           <a:p>
             <a:r>
               <a:rPr lang="en-US" dirty="0"/>
-              <a:t>Live-Demo: Storage Account anlegen, Container erstellen, Datei hochladen, URL zeigen.</a:t>
+              <a:t>Live-Demo: Speicherkonto anlegen, Container erstellen, Datei hochladen, URL zeigen.</a:t>
             </a:r>
             <a:endParaRPr lang="en-US" dirty="0"/>
           </a:p>
@@ -1416,7 +1416,7 @@
           <a:p>
             <a:r>
               <a:rPr lang="en-US" dirty="0"/>
-              <a:t>Weg – besser Blob Storage. Nur Kleinbuchstaben und Ziffern. Archive.</a:t>
+              <a:t>Weg – besser Blob-Speicher. Nur Kleinbuchstaben und Ziffern. Archive.</a:t>
             </a:r>
             <a:endParaRPr lang="en-US" dirty="0"/>
           </a:p>
@@ -3069,7 +3069,7 @@
                   <a:srgbClr val="DEE2FB"/>
                 </a:solidFill>
               </a:rPr>
-              <a:t>Auftrag 3.4: Storage Account und Blob-Container</a:t>
+              <a:t>Auftrag 3.4: Speicherkonto und Blob-Container</a:t>
             </a:r>
             <a:endParaRPr lang="en-US" sz="2000" dirty="0"/>
           </a:p>
@@ -3867,7 +3867,7 @@
                   <a:srgbClr val="27303A"/>
                 </a:solidFill>
               </a:rPr>
-              <a:t>Der Storage Account</a:t>
+              <a:t>Das Speicherkonto (Storage Account)</a:t>
             </a:r>
             <a:endParaRPr lang="en-US" sz="3400" dirty="0"/>
           </a:p>
@@ -3875,7 +3875,7 @@
       </p:sp>
       <p:pic>
         <p:nvPicPr>
-          <p:cNvPr id="3" name="diagramm" descr="Der Storage Account">    </p:cNvPr>
+          <p:cNvPr id="3" name="diagramm" descr="Das Speicherkonto (Storage Account)">    </p:cNvPr>
           <p:cNvPicPr>
             <a:picLocks noChangeAspect="1"/>
           </p:cNvPicPr>
@@ -4851,7 +4851,7 @@
                   <a:srgbClr val="27303A"/>
                 </a:solidFill>
               </a:rPr>
-              <a:t>Zugriffsebenen</a:t>
+              <a:t>Zugriffsebenen (Access Tiers)</a:t>
             </a:r>
             <a:endParaRPr lang="en-US" sz="3400" dirty="0"/>
           </a:p>

--- a/praesentationen/input-05-azure-storage.pptx
+++ b/praesentationen/input-05-azure-storage.pptx
@@ -117,7 +117,7 @@
   <p:extLst>
     <p:ext uri="{521415D9-36F7-43E2-AB2F-B90AF26B5E84}">
       <p14:sectionLst xmlns:p14="http://schemas.microsoft.com/office/powerpoint/2010/main">
-        <p14:section name="Storage" id="{6637bbb7-0eb5-6d09-03ff-d3d9a24f8557}">
+        <p14:section name="Storage" id="{71fbcfb2-c99a-9aee-75b3-d84b5c00a835}">
           <p14:sldIdLst>
             <p14:sldId id="256"/>
             <p14:sldId id="257"/>
@@ -1494,7 +1494,7 @@
     <p:bg>
       <p:bgPr>
         <a:solidFill>
-          <a:srgbClr val="27303A"/>
+          <a:srgbClr val="FFFFFF"/>
         </a:solidFill>
       </p:bgPr>
     </p:bg>
@@ -1514,7 +1514,7 @@
       </p:grpSpPr>
       <p:pic>
         <p:nvPicPr>
-          <p:cNvPr id="2" name="Image 0" descr="C:\Users\Thanam\AppData\Local\Temp\claude\c--Projekt-Trainings-azure-basics-training\a9e0bf4e-0d08-4082-a38a-5b8886538508\scratchpad\pptx\assets\logo-hell.png">    </p:cNvPr>
+          <p:cNvPr id="2" name="Image 0" descr="C:\Users\Thanam\AppData\Local\Temp\claude\c--Projekt-Trainings-azure-basics-training\a7a6b8eb-22f3-4b42-aecc-5af05d1502b1\scratchpad\folien\assets\logo-dunkel.png">    </p:cNvPr>
           <p:cNvPicPr>
             <a:picLocks noChangeAspect="1"/>
           </p:cNvPicPr>
@@ -1538,7 +1538,7 @@
       </p:pic>
       <p:pic>
         <p:nvPicPr>
-          <p:cNvPr id="3" name="Image 1" descr="C:\Users\Thanam\AppData\Local\Temp\claude\c--Projekt-Trainings-azure-basics-training\a9e0bf4e-0d08-4082-a38a-5b8886538508\scratchpad\pptx\assets\wolke.png">    </p:cNvPr>
+          <p:cNvPr id="3" name="Image 1" descr="C:\Users\Thanam\AppData\Local\Temp\claude\c--Projekt-Trainings-azure-basics-training\a7a6b8eb-22f3-4b42-aecc-5af05d1502b1\scratchpad\folien\assets\wolke.png">    </p:cNvPr>
           <p:cNvPicPr>
             <a:picLocks noChangeAspect="1"/>
           </p:cNvPicPr>
@@ -1586,7 +1586,7 @@
               <a:buNone/>
               <a:defRPr lang="en-US" sz="4400" b="1" dirty="0">
                 <a:solidFill>
-                  <a:srgbClr val="FFFFFF"/>
+                  <a:srgbClr val="27303A"/>
                 </a:solidFill>
               </a:defRPr>
             </a:lvl1pPr>
@@ -1625,7 +1625,7 @@
               <a:buNone/>
               <a:defRPr lang="en-US" sz="2000" dirty="0">
                 <a:solidFill>
-                  <a:srgbClr val="DEE2FB"/>
+                  <a:srgbClr val="006FAD"/>
                 </a:solidFill>
               </a:defRPr>
             </a:lvl1pPr>
@@ -1665,7 +1665,7 @@
             <a:r>
               <a:rPr lang="en-US" sz="1200" dirty="0">
                 <a:solidFill>
-                  <a:srgbClr val="DEE2FB"/>
+                  <a:srgbClr val="6F6F6F"/>
                 </a:solidFill>
               </a:rPr>
               <a:t>Kanton Zürich · ICT-Grundbildung · PAT Cloud Solutions</a:t>
@@ -1688,7 +1688,7 @@
     <p:bg>
       <p:bgPr>
         <a:solidFill>
-          <a:srgbClr val="006FAD"/>
+          <a:srgbClr val="F7F7F7"/>
         </a:solidFill>
       </p:bgPr>
     </p:bg>
@@ -1708,7 +1708,7 @@
       </p:grpSpPr>
       <p:pic>
         <p:nvPicPr>
-          <p:cNvPr id="2" name="Image 0" descr="C:\Users\Thanam\AppData\Local\Temp\claude\c--Projekt-Trainings-azure-basics-training\a9e0bf4e-0d08-4082-a38a-5b8886538508\scratchpad\pptx\assets\wolke.png">    </p:cNvPr>
+          <p:cNvPr id="2" name="Image 0" descr="C:\Users\Thanam\AppData\Local\Temp\claude\c--Projekt-Trainings-azure-basics-training\a7a6b8eb-22f3-4b42-aecc-5af05d1502b1\scratchpad\folien\assets\wolke.png">    </p:cNvPr>
           <p:cNvPicPr>
             <a:picLocks noChangeAspect="1"/>
           </p:cNvPicPr>
@@ -1732,7 +1732,7 @@
       </p:pic>
       <p:pic>
         <p:nvPicPr>
-          <p:cNvPr id="3" name="Image 1" descr="C:\Users\Thanam\AppData\Local\Temp\claude\c--Projekt-Trainings-azure-basics-training\a9e0bf4e-0d08-4082-a38a-5b8886538508\scratchpad\pptx\assets\logo-hell.png">    </p:cNvPr>
+          <p:cNvPr id="3" name="Image 1" descr="C:\Users\Thanam\AppData\Local\Temp\claude\c--Projekt-Trainings-azure-basics-training\a7a6b8eb-22f3-4b42-aecc-5af05d1502b1\scratchpad\folien\assets\logo-dunkel.png">    </p:cNvPr>
           <p:cNvPicPr>
             <a:picLocks noChangeAspect="1"/>
           </p:cNvPicPr>
@@ -1780,7 +1780,7 @@
               <a:buNone/>
               <a:defRPr lang="en-US" sz="4000" b="1" dirty="0">
                 <a:solidFill>
-                  <a:srgbClr val="FFFFFF"/>
+                  <a:srgbClr val="27303A"/>
                 </a:solidFill>
               </a:defRPr>
             </a:lvl1pPr>
@@ -1819,7 +1819,7 @@
               <a:buNone/>
               <a:defRPr lang="en-US" sz="2000" dirty="0">
                 <a:solidFill>
-                  <a:srgbClr val="DEE2FB"/>
+                  <a:srgbClr val="006FAD"/>
                 </a:solidFill>
               </a:defRPr>
             </a:lvl1pPr>
@@ -1866,7 +1866,7 @@
       </p:grpSpPr>
       <p:pic>
         <p:nvPicPr>
-          <p:cNvPr id="2" name="Image 0" descr="C:\Users\Thanam\AppData\Local\Temp\claude\c--Projekt-Trainings-azure-basics-training\a9e0bf4e-0d08-4082-a38a-5b8886538508\scratchpad\pptx\assets\logo-dunkel.png">    </p:cNvPr>
+          <p:cNvPr id="2" name="Image 0" descr="C:\Users\Thanam\AppData\Local\Temp\claude\c--Projekt-Trainings-azure-basics-training\a7a6b8eb-22f3-4b42-aecc-5af05d1502b1\scratchpad\folien\assets\logo-dunkel.png">    </p:cNvPr>
           <p:cNvPicPr>
             <a:picLocks noChangeAspect="1"/>
           </p:cNvPicPr>
@@ -2022,7 +2022,7 @@
     <p:bg>
       <p:bgPr>
         <a:solidFill>
-          <a:srgbClr val="27303A"/>
+          <a:srgbClr val="FFFFFF"/>
         </a:solidFill>
       </p:bgPr>
     </p:bg>
@@ -2042,7 +2042,7 @@
       </p:grpSpPr>
       <p:pic>
         <p:nvPicPr>
-          <p:cNvPr id="2" name="Image 0" descr="C:\Users\Thanam\AppData\Local\Temp\claude\c--Projekt-Trainings-azure-basics-training\a9e0bf4e-0d08-4082-a38a-5b8886538508\scratchpad\pptx\assets\logo-hell.png">    </p:cNvPr>
+          <p:cNvPr id="2" name="Image 0" descr="C:\Users\Thanam\AppData\Local\Temp\claude\c--Projekt-Trainings-azure-basics-training\a7a6b8eb-22f3-4b42-aecc-5af05d1502b1\scratchpad\folien\assets\logo-dunkel.png">    </p:cNvPr>
           <p:cNvPicPr>
             <a:picLocks noChangeAspect="1"/>
           </p:cNvPicPr>
@@ -2090,7 +2090,7 @@
               <a:buNone/>
               <a:defRPr lang="en-US" sz="4000" b="1" dirty="0">
                 <a:solidFill>
-                  <a:srgbClr val="FFFFFF"/>
+                  <a:srgbClr val="27303A"/>
                 </a:solidFill>
               </a:defRPr>
             </a:lvl1pPr>
@@ -2129,7 +2129,7 @@
               <a:buNone/>
               <a:defRPr lang="en-US" sz="2000" dirty="0">
                 <a:solidFill>
-                  <a:srgbClr val="DEE2FB"/>
+                  <a:srgbClr val="006FAD"/>
                 </a:solidFill>
               </a:defRPr>
             </a:lvl1pPr>
@@ -2522,7 +2522,7 @@
             <a:r>
               <a:rPr lang="en-US" sz="4400" b="1" dirty="0">
                 <a:solidFill>
-                  <a:srgbClr val="FFFFFF"/>
+                  <a:srgbClr val="27303A"/>
                 </a:solidFill>
               </a:rPr>
               <a:t>Azure Storage</a:t>
@@ -2560,7 +2560,7 @@
             <a:r>
               <a:rPr lang="en-US" sz="2000" dirty="0">
                 <a:solidFill>
-                  <a:srgbClr val="DEE2FB"/>
+                  <a:srgbClr val="006FAD"/>
                 </a:solidFill>
               </a:rPr>
               <a:t>Input 2 · Tag 3</a:t>
@@ -2659,7 +2659,7 @@
       </p:sp>
       <p:pic>
         <p:nvPicPr>
-          <p:cNvPr id="4" name="icon-FaBook" descr="C:\Users\Thanam\AppData\Local\Temp\claude\c--Projekt-Trainings-azure-basics-training\a9e0bf4e-0d08-4082-a38a-5b8886538508\scratchpad\pptx\assets\icons\FaBook.png">    </p:cNvPr>
+          <p:cNvPr id="4" name="icon-FaBook" descr="C:\Users\Thanam\AppData\Local\Temp\claude\c--Projekt-Trainings-azure-basics-training\a7a6b8eb-22f3-4b42-aecc-5af05d1502b1\scratchpad\folien\assets\icons\FaBook.png">    </p:cNvPr>
           <p:cNvPicPr>
             <a:picLocks noChangeAspect="1"/>
           </p:cNvPicPr>
@@ -2758,7 +2758,7 @@
       </p:sp>
       <p:pic>
         <p:nvPicPr>
-          <p:cNvPr id="7" name="icon-FaGraduationCap" descr="C:\Users\Thanam\AppData\Local\Temp\claude\c--Projekt-Trainings-azure-basics-training\a9e0bf4e-0d08-4082-a38a-5b8886538508\scratchpad\pptx\assets\icons\FaGraduationCap.png">    </p:cNvPr>
+          <p:cNvPr id="7" name="icon-FaGraduationCap" descr="C:\Users\Thanam\AppData\Local\Temp\claude\c--Projekt-Trainings-azure-basics-training\a7a6b8eb-22f3-4b42-aecc-5af05d1502b1\scratchpad\folien\assets\icons\FaGraduationCap.png">    </p:cNvPr>
           <p:cNvPicPr>
             <a:picLocks noChangeAspect="1"/>
           </p:cNvPicPr>
@@ -2857,7 +2857,7 @@
       </p:sp>
       <p:pic>
         <p:nvPicPr>
-          <p:cNvPr id="10" name="icon-FaBook" descr="C:\Users\Thanam\AppData\Local\Temp\claude\c--Projekt-Trainings-azure-basics-training\a9e0bf4e-0d08-4082-a38a-5b8886538508\scratchpad\pptx\assets\icons\FaBook.png">    </p:cNvPr>
+          <p:cNvPr id="10" name="icon-FaBook" descr="C:\Users\Thanam\AppData\Local\Temp\claude\c--Projekt-Trainings-azure-basics-training\a7a6b8eb-22f3-4b42-aecc-5af05d1502b1\scratchpad\folien\assets\icons\FaBook.png">    </p:cNvPr>
           <p:cNvPicPr>
             <a:picLocks noChangeAspect="1"/>
           </p:cNvPicPr>
@@ -3028,7 +3028,7 @@
             <a:r>
               <a:rPr lang="en-US" sz="4000" b="1" dirty="0">
                 <a:solidFill>
-                  <a:srgbClr val="FFFFFF"/>
+                  <a:srgbClr val="27303A"/>
                 </a:solidFill>
               </a:rPr>
               <a:t>Jetzt du</a:t>
@@ -3066,7 +3066,7 @@
             <a:r>
               <a:rPr lang="en-US" sz="2000" dirty="0">
                 <a:solidFill>
-                  <a:srgbClr val="DEE2FB"/>
+                  <a:srgbClr val="006FAD"/>
                 </a:solidFill>
               </a:rPr>
               <a:t>Auftrag 3.4: Speicherkonto und Blob-Container</a:t>
@@ -3192,7 +3192,7 @@
       </p:sp>
       <p:pic>
         <p:nvPicPr>
-          <p:cNvPr id="5" name="icon-FaHdd" descr="C:\Users\Thanam\AppData\Local\Temp\claude\c--Projekt-Trainings-azure-basics-training\a9e0bf4e-0d08-4082-a38a-5b8886538508\scratchpad\pptx\assets\icons\FaHdd.png">    </p:cNvPr>
+          <p:cNvPr id="5" name="icon-FaHdd" descr="C:\Users\Thanam\AppData\Local\Temp\claude\c--Projekt-Trainings-azure-basics-training\a7a6b8eb-22f3-4b42-aecc-5af05d1502b1\scratchpad\folien\assets\icons\FaHdd.png">    </p:cNvPr>
           <p:cNvPicPr>
             <a:picLocks noChangeAspect="1"/>
           </p:cNvPicPr>
@@ -3345,7 +3345,7 @@
       </p:sp>
       <p:pic>
         <p:nvPicPr>
-          <p:cNvPr id="10" name="icon-FaClock" descr="C:\Users\Thanam\AppData\Local\Temp\claude\c--Projekt-Trainings-azure-basics-training\a9e0bf4e-0d08-4082-a38a-5b8886538508\scratchpad\pptx\assets\icons\FaClock.png">    </p:cNvPr>
+          <p:cNvPr id="10" name="icon-FaClock" descr="C:\Users\Thanam\AppData\Local\Temp\claude\c--Projekt-Trainings-azure-basics-training\a7a6b8eb-22f3-4b42-aecc-5af05d1502b1\scratchpad\folien\assets\icons\FaClock.png">    </p:cNvPr>
           <p:cNvPicPr>
             <a:picLocks noChangeAspect="1"/>
           </p:cNvPicPr>
@@ -3498,7 +3498,7 @@
       </p:sp>
       <p:pic>
         <p:nvPicPr>
-          <p:cNvPr id="15" name="icon-FaRedo" descr="C:\Users\Thanam\AppData\Local\Temp\claude\c--Projekt-Trainings-azure-basics-training\a9e0bf4e-0d08-4082-a38a-5b8886538508\scratchpad\pptx\assets\icons\FaRedo.png">    </p:cNvPr>
+          <p:cNvPr id="15" name="icon-FaRedo" descr="C:\Users\Thanam\AppData\Local\Temp\claude\c--Projekt-Trainings-azure-basics-training\a7a6b8eb-22f3-4b42-aecc-5af05d1502b1\scratchpad\folien\assets\icons\FaRedo.png">    </p:cNvPr>
           <p:cNvPicPr>
             <a:picLocks noChangeAspect="1"/>
           </p:cNvPicPr>
@@ -4059,7 +4059,7 @@
       </p:sp>
       <p:pic>
         <p:nvPicPr>
-          <p:cNvPr id="5" name="icon-FaGlobeEurope" descr="C:\Users\Thanam\AppData\Local\Temp\claude\c--Projekt-Trainings-azure-basics-training\a9e0bf4e-0d08-4082-a38a-5b8886538508\scratchpad\pptx\assets\icons\FaGlobeEurope.png">    </p:cNvPr>
+          <p:cNvPr id="5" name="icon-FaGlobeEurope" descr="C:\Users\Thanam\AppData\Local\Temp\claude\c--Projekt-Trainings-azure-basics-training\a7a6b8eb-22f3-4b42-aecc-5af05d1502b1\scratchpad\folien\assets\icons\FaGlobeEurope.png">    </p:cNvPr>
           <p:cNvPicPr>
             <a:picLocks noChangeAspect="1"/>
           </p:cNvPicPr>
@@ -4212,7 +4212,7 @@
       </p:sp>
       <p:pic>
         <p:nvPicPr>
-          <p:cNvPr id="10" name="icon-FaFolderOpen" descr="C:\Users\Thanam\AppData\Local\Temp\claude\c--Projekt-Trainings-azure-basics-training\a9e0bf4e-0d08-4082-a38a-5b8886538508\scratchpad\pptx\assets\icons\FaFolderOpen.png">    </p:cNvPr>
+          <p:cNvPr id="10" name="icon-FaFolderOpen" descr="C:\Users\Thanam\AppData\Local\Temp\claude\c--Projekt-Trainings-azure-basics-training\a7a6b8eb-22f3-4b42-aecc-5af05d1502b1\scratchpad\folien\assets\icons\FaFolderOpen.png">    </p:cNvPr>
           <p:cNvPicPr>
             <a:picLocks noChangeAspect="1"/>
           </p:cNvPicPr>
@@ -4365,7 +4365,7 @@
       </p:sp>
       <p:pic>
         <p:nvPicPr>
-          <p:cNvPr id="15" name="icon-FaLock" descr="C:\Users\Thanam\AppData\Local\Temp\claude\c--Projekt-Trainings-azure-basics-training\a9e0bf4e-0d08-4082-a38a-5b8886538508\scratchpad\pptx\assets\icons\FaLock.png">    </p:cNvPr>
+          <p:cNvPr id="15" name="icon-FaLock" descr="C:\Users\Thanam\AppData\Local\Temp\claude\c--Projekt-Trainings-azure-basics-training\a7a6b8eb-22f3-4b42-aecc-5af05d1502b1\scratchpad\folien\assets\icons\FaLock.png">    </p:cNvPr>
           <p:cNvPicPr>
             <a:picLocks noChangeAspect="1"/>
           </p:cNvPicPr>
@@ -4518,7 +4518,7 @@
       </p:sp>
       <p:pic>
         <p:nvPicPr>
-          <p:cNvPr id="20" name="icon-FaCopy" descr="C:\Users\Thanam\AppData\Local\Temp\claude\c--Projekt-Trainings-azure-basics-training\a9e0bf4e-0d08-4082-a38a-5b8886538508\scratchpad\pptx\assets\icons\FaCopy.png">    </p:cNvPr>
+          <p:cNvPr id="20" name="icon-FaCopy" descr="C:\Users\Thanam\AppData\Local\Temp\claude\c--Projekt-Trainings-azure-basics-training\a7a6b8eb-22f3-4b42-aecc-5af05d1502b1\scratchpad\folien\assets\icons\FaCopy.png">    </p:cNvPr>
           <p:cNvPicPr>
             <a:picLocks noChangeAspect="1"/>
           </p:cNvPicPr>
@@ -7133,7 +7133,7 @@
       </p:sp>
       <p:pic>
         <p:nvPicPr>
-          <p:cNvPr id="6" name="icon-FaQuestionCircle" descr="C:\Users\Thanam\AppData\Local\Temp\claude\c--Projekt-Trainings-azure-basics-training\a9e0bf4e-0d08-4082-a38a-5b8886538508\scratchpad\pptx\assets\icons\FaQuestionCircle.png">    </p:cNvPr>
+          <p:cNvPr id="6" name="icon-FaQuestionCircle" descr="C:\Users\Thanam\AppData\Local\Temp\claude\c--Projekt-Trainings-azure-basics-training\a7a6b8eb-22f3-4b42-aecc-5af05d1502b1\scratchpad\folien\assets\icons\FaQuestionCircle.png">    </p:cNvPr>
           <p:cNvPicPr>
             <a:picLocks noChangeAspect="1"/>
           </p:cNvPicPr>
@@ -7286,7 +7286,7 @@
       </p:sp>
       <p:pic>
         <p:nvPicPr>
-          <p:cNvPr id="11" name="icon-FaQuestionCircle" descr="C:\Users\Thanam\AppData\Local\Temp\claude\c--Projekt-Trainings-azure-basics-training\a9e0bf4e-0d08-4082-a38a-5b8886538508\scratchpad\pptx\assets\icons\FaQuestionCircle.png">    </p:cNvPr>
+          <p:cNvPr id="11" name="icon-FaQuestionCircle" descr="C:\Users\Thanam\AppData\Local\Temp\claude\c--Projekt-Trainings-azure-basics-training\a7a6b8eb-22f3-4b42-aecc-5af05d1502b1\scratchpad\folien\assets\icons\FaQuestionCircle.png">    </p:cNvPr>
           <p:cNvPicPr>
             <a:picLocks noChangeAspect="1"/>
           </p:cNvPicPr>
@@ -7439,7 +7439,7 @@
       </p:sp>
       <p:pic>
         <p:nvPicPr>
-          <p:cNvPr id="16" name="icon-FaQuestionCircle" descr="C:\Users\Thanam\AppData\Local\Temp\claude\c--Projekt-Trainings-azure-basics-training\a9e0bf4e-0d08-4082-a38a-5b8886538508\scratchpad\pptx\assets\icons\FaQuestionCircle.png">    </p:cNvPr>
+          <p:cNvPr id="16" name="icon-FaQuestionCircle" descr="C:\Users\Thanam\AppData\Local\Temp\claude\c--Projekt-Trainings-azure-basics-training\a7a6b8eb-22f3-4b42-aecc-5af05d1502b1\scratchpad\folien\assets\icons\FaQuestionCircle.png">    </p:cNvPr>
           <p:cNvPicPr>
             <a:picLocks noChangeAspect="1"/>
           </p:cNvPicPr>
